--- a/ppts/CHAPTER 7 Agent II.pptx
+++ b/ppts/CHAPTER 7 Agent II.pptx
@@ -258,7 +258,7 @@
                 <a:latin typeface="맑은 고딕" panose="020B0503020000020004" pitchFamily="50" charset="-127"/>
                 <a:ea typeface="맑은 고딕" panose="020B0503020000020004" pitchFamily="50" charset="-127"/>
               </a:rPr>
-              <a:t>2026-07-22</a:t>
+              <a:t>2026-08-20</a:t>
             </a:fld>
             <a:endParaRPr lang="ko-KR" altLang="en-US">
               <a:latin typeface="맑은 고딕" panose="020B0503020000020004" pitchFamily="50" charset="-127"/>
@@ -444,7 +444,7 @@
           <a:p>
             <a:fld id="{43E1C3DD-4A19-441D-907C-380838DB51C4}" type="datetime1">
               <a:rPr lang="ko-KR" altLang="en-US" noProof="0" smtClean="0"/>
-              <a:t>2026-07-22</a:t>
+              <a:t>2026-08-20</a:t>
             </a:fld>
             <a:endParaRPr lang="ko-KR" altLang="en-US" noProof="0"/>
           </a:p>
@@ -1292,7 +1292,7 @@
           <a:p>
             <a:fld id="{990475B5-67CA-4281-BDCA-DA943C3C8EB3}" type="datetime1">
               <a:rPr lang="ko-KR" altLang="en-US" noProof="0" smtClean="0"/>
-              <a:t>2026-07-22</a:t>
+              <a:t>2026-08-20</a:t>
             </a:fld>
             <a:endParaRPr lang="ko-KR" altLang="en-US" noProof="0"/>
           </a:p>
@@ -1946,7 +1946,7 @@
           <a:p>
             <a:fld id="{48A87A34-81AB-432B-8DAE-1953F412C126}" type="datetimeFigureOut">
               <a:rPr lang="en-US" smtClean="0"/>
-              <a:t>7/22/2026</a:t>
+              <a:t>8/20/2026</a:t>
             </a:fld>
             <a:endParaRPr lang="en-US" dirty="0"/>
           </a:p>
@@ -2242,7 +2242,7 @@
           <a:p>
             <a:fld id="{C655C81E-72E7-4D05-94B5-F45B321A525D}" type="datetime1">
               <a:rPr lang="ko-KR" altLang="en-US" noProof="0" smtClean="0"/>
-              <a:t>2026-07-22</a:t>
+              <a:t>2026-08-20</a:t>
             </a:fld>
             <a:endParaRPr lang="ko-KR" altLang="en-US" noProof="0" dirty="0">
               <a:latin typeface="맑은 고딕" panose="020B0503020000020004" pitchFamily="50" charset="-127"/>
@@ -3465,12 +3465,18 @@
         <p:spPr>
           <a:xfrm>
             <a:off x="580103" y="1364872"/>
-            <a:ext cx="10964802" cy="793166"/>
+            <a:ext cx="10964802" cy="1711815"/>
           </a:xfrm>
           <a:prstGeom prst="rect">
             <a:avLst/>
           </a:prstGeom>
           <a:noFill/>
+          <a:ln>
+            <a:solidFill>
+              <a:schemeClr val="tx1"/>
+            </a:solidFill>
+            <a:prstDash val="dash"/>
+          </a:ln>
         </p:spPr>
         <p:txBody>
           <a:bodyPr wrap="square">
@@ -3486,82 +3492,118 @@
               <a:buChar char="v"/>
             </a:pPr>
             <a:r>
-              <a:rPr lang="en-US" altLang="ko-KR" sz="1600" dirty="0">
+              <a:rPr lang="en-US" altLang="ko-KR" dirty="0">
                 <a:latin typeface="D2Coding" panose="020B0609020101020101" pitchFamily="49" charset="-127"/>
                 <a:ea typeface="D2Coding" panose="020B0609020101020101" pitchFamily="49" charset="-127"/>
               </a:rPr>
               <a:t>6</a:t>
             </a:r>
             <a:r>
-              <a:rPr lang="ko-KR" altLang="en-US" sz="1600" dirty="0">
+              <a:rPr lang="ko-KR" altLang="en-US" dirty="0">
                 <a:latin typeface="D2Coding" panose="020B0609020101020101" pitchFamily="49" charset="-127"/>
                 <a:ea typeface="D2Coding" panose="020B0609020101020101" pitchFamily="49" charset="-127"/>
               </a:rPr>
               <a:t>장까지는 생각의 사슬</a:t>
             </a:r>
             <a:r>
-              <a:rPr lang="en-US" altLang="ko-KR" sz="1600" dirty="0">
+              <a:rPr lang="en-US" altLang="ko-KR" dirty="0">
                 <a:latin typeface="D2Coding" panose="020B0609020101020101" pitchFamily="49" charset="-127"/>
                 <a:ea typeface="D2Coding" panose="020B0609020101020101" pitchFamily="49" charset="-127"/>
               </a:rPr>
               <a:t>(Chain-of-Thought) </a:t>
             </a:r>
             <a:r>
-              <a:rPr lang="ko-KR" altLang="en-US" sz="1600" dirty="0" err="1">
+              <a:rPr lang="ko-KR" altLang="en-US" dirty="0" err="1">
                 <a:latin typeface="D2Coding" panose="020B0609020101020101" pitchFamily="49" charset="-127"/>
                 <a:ea typeface="D2Coding" panose="020B0609020101020101" pitchFamily="49" charset="-127"/>
               </a:rPr>
               <a:t>프롬프팅</a:t>
             </a:r>
             <a:r>
-              <a:rPr lang="en-US" altLang="ko-KR" sz="1600" dirty="0">
+              <a:rPr lang="en-US" altLang="ko-KR" dirty="0">
                 <a:latin typeface="D2Coding" panose="020B0609020101020101" pitchFamily="49" charset="-127"/>
                 <a:ea typeface="D2Coding" panose="020B0609020101020101" pitchFamily="49" charset="-127"/>
               </a:rPr>
               <a:t>, </a:t>
             </a:r>
             <a:r>
-              <a:rPr lang="ko-KR" altLang="en-US" sz="1600" dirty="0">
+              <a:rPr lang="ko-KR" altLang="en-US" dirty="0">
                 <a:latin typeface="D2Coding" panose="020B0609020101020101" pitchFamily="49" charset="-127"/>
                 <a:ea typeface="D2Coding" panose="020B0609020101020101" pitchFamily="49" charset="-127"/>
               </a:rPr>
               <a:t>도구 사용</a:t>
             </a:r>
             <a:r>
-              <a:rPr lang="en-US" altLang="ko-KR" sz="1600" dirty="0">
+              <a:rPr lang="en-US" altLang="ko-KR" dirty="0">
                 <a:latin typeface="D2Coding" panose="020B0609020101020101" pitchFamily="49" charset="-127"/>
                 <a:ea typeface="D2Coding" panose="020B0609020101020101" pitchFamily="49" charset="-127"/>
               </a:rPr>
               <a:t>(Tool Use), </a:t>
             </a:r>
             <a:r>
-              <a:rPr lang="ko-KR" altLang="en-US" sz="1600" dirty="0">
+              <a:rPr lang="ko-KR" altLang="en-US" dirty="0">
                 <a:latin typeface="D2Coding" panose="020B0609020101020101" pitchFamily="49" charset="-127"/>
                 <a:ea typeface="D2Coding" panose="020B0609020101020101" pitchFamily="49" charset="-127"/>
               </a:rPr>
               <a:t>그리고 루프</a:t>
             </a:r>
             <a:r>
-              <a:rPr lang="en-US" altLang="ko-KR" sz="1600" dirty="0">
+              <a:rPr lang="en-US" altLang="ko-KR" dirty="0">
                 <a:latin typeface="D2Coding" panose="020B0609020101020101" pitchFamily="49" charset="-127"/>
                 <a:ea typeface="D2Coding" panose="020B0609020101020101" pitchFamily="49" charset="-127"/>
               </a:rPr>
               <a:t>(Looping)</a:t>
             </a:r>
             <a:r>
-              <a:rPr lang="ko-KR" altLang="en-US" sz="1600" dirty="0">
+              <a:rPr lang="ko-KR" altLang="en-US" dirty="0">
                 <a:latin typeface="D2Coding" panose="020B0609020101020101" pitchFamily="49" charset="-127"/>
                 <a:ea typeface="D2Coding" panose="020B0609020101020101" pitchFamily="49" charset="-127"/>
               </a:rPr>
               <a:t>가 결합된 </a:t>
             </a:r>
             <a:r>
-              <a:rPr lang="en-US" altLang="ko-KR" sz="1600" dirty="0">
+              <a:rPr lang="en-US" altLang="ko-KR" dirty="0">
                 <a:latin typeface="D2Coding" panose="020B0609020101020101" pitchFamily="49" charset="-127"/>
                 <a:ea typeface="D2Coding" panose="020B0609020101020101" pitchFamily="49" charset="-127"/>
               </a:rPr>
               <a:t>Agent LLM </a:t>
             </a:r>
+            <a:r>
+              <a:rPr lang="en-US" altLang="ko-KR" dirty="0">
+                <a:latin typeface="D2Coding" panose="020B0609020101020101" pitchFamily="49" charset="-127"/>
+                <a:ea typeface="D2Coding" panose="020B0609020101020101" pitchFamily="49" charset="-127"/>
+                <a:sym typeface="Wingdings" panose="05000000000000000000" pitchFamily="2" charset="2"/>
+              </a:rPr>
+              <a:t></a:t>
+            </a:r>
+          </a:p>
+          <a:p>
+            <a:pPr marL="285750" indent="-285750">
+              <a:lnSpc>
+                <a:spcPct val="150000"/>
+              </a:lnSpc>
+              <a:buFont typeface="Wingdings" panose="05000000000000000000" pitchFamily="2" charset="2"/>
+              <a:buChar char="v"/>
+            </a:pPr>
+            <a:endParaRPr lang="en-US" altLang="ko-KR" dirty="0">
+              <a:latin typeface="D2Coding" panose="020B0609020101020101" pitchFamily="49" charset="-127"/>
+              <a:ea typeface="D2Coding" panose="020B0609020101020101" pitchFamily="49" charset="-127"/>
+              <a:sym typeface="Wingdings" panose="05000000000000000000" pitchFamily="2" charset="2"/>
+            </a:endParaRPr>
+          </a:p>
+          <a:p>
+            <a:pPr marL="285750" indent="-285750">
+              <a:lnSpc>
+                <a:spcPct val="150000"/>
+              </a:lnSpc>
+              <a:buFont typeface="Wingdings" panose="05000000000000000000" pitchFamily="2" charset="2"/>
+              <a:buChar char="v"/>
+            </a:pPr>
+            <a:endParaRPr lang="en-US" altLang="ko-KR" dirty="0">
+              <a:latin typeface="D2Coding" panose="020B0609020101020101" pitchFamily="49" charset="-127"/>
+              <a:ea typeface="D2Coding" panose="020B0609020101020101" pitchFamily="49" charset="-127"/>
+              <a:sym typeface="Wingdings" panose="05000000000000000000" pitchFamily="2" charset="2"/>
+            </a:endParaRPr>
           </a:p>
         </p:txBody>
       </p:sp>
@@ -3579,8 +3621,8 @@
         </p:nvSpPr>
         <p:spPr>
           <a:xfrm>
-            <a:off x="2305049" y="1942821"/>
-            <a:ext cx="8115301" cy="1323439"/>
+            <a:off x="5005921" y="1901669"/>
+            <a:ext cx="6081179" cy="1169551"/>
           </a:xfrm>
           <a:prstGeom prst="rect">
             <a:avLst/>
@@ -3598,7 +3640,7 @@
               <a:buAutoNum type="arabicPeriod"/>
             </a:pPr>
             <a:r>
-              <a:rPr lang="ko-KR" altLang="en-US" sz="1600" dirty="0">
+              <a:rPr lang="ko-KR" altLang="en-US" sz="1400" dirty="0">
                 <a:latin typeface="D2Coding" panose="020B0609020101020101" pitchFamily="49" charset="-127"/>
                 <a:ea typeface="D2Coding" panose="020B0609020101020101" pitchFamily="49" charset="-127"/>
               </a:rPr>
@@ -3611,21 +3653,21 @@
               <a:buAutoNum type="arabicPeriod"/>
             </a:pPr>
             <a:r>
-              <a:rPr lang="ko-KR" altLang="en-US" sz="1600" dirty="0">
+              <a:rPr lang="ko-KR" altLang="en-US" sz="1400" dirty="0">
                 <a:latin typeface="D2Coding" panose="020B0609020101020101" pitchFamily="49" charset="-127"/>
                 <a:ea typeface="D2Coding" panose="020B0609020101020101" pitchFamily="49" charset="-127"/>
               </a:rPr>
               <a:t>어떻게 해결할지 단계별로 계획 수립 (</a:t>
             </a:r>
             <a:r>
-              <a:rPr lang="ko-KR" altLang="en-US" sz="1600" dirty="0" err="1">
+              <a:rPr lang="ko-KR" altLang="en-US" sz="1400" dirty="0" err="1">
                 <a:latin typeface="D2Coding" panose="020B0609020101020101" pitchFamily="49" charset="-127"/>
                 <a:ea typeface="D2Coding" panose="020B0609020101020101" pitchFamily="49" charset="-127"/>
               </a:rPr>
               <a:t>CoT</a:t>
             </a:r>
             <a:r>
-              <a:rPr lang="ko-KR" altLang="en-US" sz="1600" dirty="0">
+              <a:rPr lang="ko-KR" altLang="en-US" sz="1400" dirty="0">
                 <a:latin typeface="D2Coding" panose="020B0609020101020101" pitchFamily="49" charset="-127"/>
                 <a:ea typeface="D2Coding" panose="020B0609020101020101" pitchFamily="49" charset="-127"/>
               </a:rPr>
@@ -3638,21 +3680,21 @@
               <a:buAutoNum type="arabicPeriod"/>
             </a:pPr>
             <a:r>
-              <a:rPr lang="ko-KR" altLang="en-US" sz="1600" dirty="0">
+              <a:rPr lang="ko-KR" altLang="en-US" sz="1400" dirty="0">
                 <a:latin typeface="D2Coding" panose="020B0609020101020101" pitchFamily="49" charset="-127"/>
                 <a:ea typeface="D2Coding" panose="020B0609020101020101" pitchFamily="49" charset="-127"/>
               </a:rPr>
               <a:t>필요한 도구를 사용 (Tool </a:t>
             </a:r>
             <a:r>
-              <a:rPr lang="ko-KR" altLang="en-US" sz="1600" dirty="0" err="1">
+              <a:rPr lang="ko-KR" altLang="en-US" sz="1400" dirty="0" err="1">
                 <a:latin typeface="D2Coding" panose="020B0609020101020101" pitchFamily="49" charset="-127"/>
                 <a:ea typeface="D2Coding" panose="020B0609020101020101" pitchFamily="49" charset="-127"/>
               </a:rPr>
               <a:t>Use</a:t>
             </a:r>
             <a:r>
-              <a:rPr lang="ko-KR" altLang="en-US" sz="1600" dirty="0">
+              <a:rPr lang="ko-KR" altLang="en-US" sz="1400" dirty="0">
                 <a:latin typeface="D2Coding" panose="020B0609020101020101" pitchFamily="49" charset="-127"/>
                 <a:ea typeface="D2Coding" panose="020B0609020101020101" pitchFamily="49" charset="-127"/>
               </a:rPr>
@@ -3665,21 +3707,21 @@
               <a:buAutoNum type="arabicPeriod"/>
             </a:pPr>
             <a:r>
-              <a:rPr lang="ko-KR" altLang="en-US" sz="1600" dirty="0">
+              <a:rPr lang="ko-KR" altLang="en-US" sz="1400" dirty="0">
                 <a:latin typeface="D2Coding" panose="020B0609020101020101" pitchFamily="49" charset="-127"/>
                 <a:ea typeface="D2Coding" panose="020B0609020101020101" pitchFamily="49" charset="-127"/>
               </a:rPr>
               <a:t>결과가 마음에 안 들거나 추가 작업 필요하면 다시 시도 (</a:t>
             </a:r>
             <a:r>
-              <a:rPr lang="ko-KR" altLang="en-US" sz="1600" dirty="0" err="1">
+              <a:rPr lang="ko-KR" altLang="en-US" sz="1400" dirty="0" err="1">
                 <a:latin typeface="D2Coding" panose="020B0609020101020101" pitchFamily="49" charset="-127"/>
                 <a:ea typeface="D2Coding" panose="020B0609020101020101" pitchFamily="49" charset="-127"/>
               </a:rPr>
               <a:t>Looping</a:t>
             </a:r>
             <a:r>
-              <a:rPr lang="ko-KR" altLang="en-US" sz="1600" dirty="0">
+              <a:rPr lang="ko-KR" altLang="en-US" sz="1400" dirty="0">
                 <a:latin typeface="D2Coding" panose="020B0609020101020101" pitchFamily="49" charset="-127"/>
                 <a:ea typeface="D2Coding" panose="020B0609020101020101" pitchFamily="49" charset="-127"/>
               </a:rPr>
@@ -3692,7 +3734,7 @@
               <a:buAutoNum type="arabicPeriod"/>
             </a:pPr>
             <a:r>
-              <a:rPr lang="ko-KR" altLang="en-US" sz="1600" dirty="0">
+              <a:rPr lang="ko-KR" altLang="en-US" sz="1400" dirty="0">
                 <a:latin typeface="D2Coding" panose="020B0609020101020101" pitchFamily="49" charset="-127"/>
                 <a:ea typeface="D2Coding" panose="020B0609020101020101" pitchFamily="49" charset="-127"/>
               </a:rPr>
@@ -3715,13 +3757,19 @@
         </p:nvSpPr>
         <p:spPr>
           <a:xfrm>
-            <a:off x="580103" y="4116605"/>
-            <a:ext cx="10964802" cy="2136803"/>
+            <a:off x="580103" y="4288005"/>
+            <a:ext cx="10964802" cy="1993494"/>
           </a:xfrm>
           <a:prstGeom prst="rect">
             <a:avLst/>
           </a:prstGeom>
           <a:noFill/>
+          <a:ln>
+            <a:solidFill>
+              <a:schemeClr val="tx1"/>
+            </a:solidFill>
+            <a:prstDash val="dash"/>
+          </a:ln>
         </p:spPr>
         <p:txBody>
           <a:bodyPr wrap="square" rtlCol="0">
@@ -3737,14 +3785,14 @@
               <a:buChar char="v"/>
             </a:pPr>
             <a:r>
-              <a:rPr lang="ko-KR" altLang="en-US" sz="1600" dirty="0">
+              <a:rPr lang="ko-KR" altLang="en-US" dirty="0">
                 <a:latin typeface="D2Coding" panose="020B0609020101020101" pitchFamily="49" charset="-127"/>
                 <a:ea typeface="D2Coding" panose="020B0609020101020101" pitchFamily="49" charset="-127"/>
               </a:rPr>
               <a:t>성찰 </a:t>
             </a:r>
             <a:r>
-              <a:rPr lang="en-US" altLang="ko-KR" sz="1600" dirty="0">
+              <a:rPr lang="en-US" altLang="ko-KR" dirty="0">
                 <a:latin typeface="D2Coding" panose="020B0609020101020101" pitchFamily="49" charset="-127"/>
                 <a:ea typeface="D2Coding" panose="020B0609020101020101" pitchFamily="49" charset="-127"/>
               </a:rPr>
@@ -3760,44 +3808,67 @@
               <a:buChar char="v"/>
             </a:pPr>
             <a:r>
-              <a:rPr lang="ko-KR" altLang="en-US" sz="1400" dirty="0">
+              <a:rPr lang="ko-KR" altLang="en-US" sz="1600" dirty="0">
                 <a:latin typeface="D2Coding" panose="020B0609020101020101" pitchFamily="49" charset="-127"/>
                 <a:ea typeface="D2Coding" panose="020B0609020101020101" pitchFamily="49" charset="-127"/>
               </a:rPr>
               <a:t>인간의 사고방식 패턴에서 착안한 기술로</a:t>
             </a:r>
             <a:r>
-              <a:rPr lang="en-US" altLang="ko-KR" sz="1400" dirty="0">
+              <a:rPr lang="en-US" altLang="ko-KR" sz="1600" dirty="0">
                 <a:latin typeface="D2Coding" panose="020B0609020101020101" pitchFamily="49" charset="-127"/>
                 <a:ea typeface="D2Coding" panose="020B0609020101020101" pitchFamily="49" charset="-127"/>
               </a:rPr>
               <a:t>, LLM </a:t>
             </a:r>
             <a:r>
-              <a:rPr lang="ko-KR" altLang="en-US" sz="1400" dirty="0">
+              <a:rPr lang="ko-KR" altLang="en-US" sz="1600" dirty="0">
                 <a:latin typeface="D2Coding" panose="020B0609020101020101" pitchFamily="49" charset="-127"/>
                 <a:ea typeface="D2Coding" panose="020B0609020101020101" pitchFamily="49" charset="-127"/>
               </a:rPr>
               <a:t>앱이 지난 반복</a:t>
             </a:r>
             <a:r>
-              <a:rPr lang="en-US" altLang="ko-KR" sz="1400" dirty="0">
+              <a:rPr lang="en-US" altLang="ko-KR" sz="1600" dirty="0">
                 <a:latin typeface="D2Coding" panose="020B0609020101020101" pitchFamily="49" charset="-127"/>
                 <a:ea typeface="D2Coding" panose="020B0609020101020101" pitchFamily="49" charset="-127"/>
               </a:rPr>
               <a:t>(iteration) </a:t>
             </a:r>
             <a:r>
-              <a:rPr lang="ko-KR" altLang="en-US" sz="1400" dirty="0">
+              <a:rPr lang="ko-KR" altLang="en-US" sz="1600" dirty="0">
                 <a:latin typeface="D2Coding" panose="020B0609020101020101" pitchFamily="49" charset="-127"/>
                 <a:ea typeface="D2Coding" panose="020B0609020101020101" pitchFamily="49" charset="-127"/>
               </a:rPr>
               <a:t>과정에서 얻은 성찰 내용을 기억하는 능력과 함께 자신의 과거 출력물과 선택을 스스로 분석할 수 있는 기회를 제공하는 것</a:t>
             </a:r>
-            <a:endParaRPr lang="en-US" altLang="ko-KR" sz="1400" dirty="0">
+            <a:endParaRPr lang="en-US" altLang="ko-KR" dirty="0">
               <a:latin typeface="D2Coding" panose="020B0609020101020101" pitchFamily="49" charset="-127"/>
               <a:ea typeface="D2Coding" panose="020B0609020101020101" pitchFamily="49" charset="-127"/>
             </a:endParaRPr>
+          </a:p>
+          <a:p>
+            <a:pPr marL="285750" indent="-285750">
+              <a:lnSpc>
+                <a:spcPct val="150000"/>
+              </a:lnSpc>
+              <a:buFont typeface="Wingdings" panose="05000000000000000000" pitchFamily="2" charset="2"/>
+              <a:buChar char="v"/>
+            </a:pPr>
+            <a:r>
+              <a:rPr lang="ko-KR" altLang="en-US" dirty="0">
+                <a:latin typeface="D2Coding" panose="020B0609020101020101" pitchFamily="49" charset="-127"/>
+                <a:ea typeface="D2Coding" panose="020B0609020101020101" pitchFamily="49" charset="-127"/>
+              </a:rPr>
+              <a:t>멀티 에이전트 </a:t>
+            </a:r>
+            <a:r>
+              <a:rPr lang="en-US" altLang="ko-KR" dirty="0">
+                <a:latin typeface="D2Coding" panose="020B0609020101020101" pitchFamily="49" charset="-127"/>
+                <a:ea typeface="D2Coding" panose="020B0609020101020101" pitchFamily="49" charset="-127"/>
+              </a:rPr>
+              <a:t>(Multi-agent)</a:t>
+            </a:r>
           </a:p>
           <a:p>
             <a:pPr marL="742950" lvl="1" indent="-285750">
@@ -3807,113 +3878,77 @@
               <a:buFont typeface="Wingdings" panose="05000000000000000000" pitchFamily="2" charset="2"/>
               <a:buChar char="v"/>
             </a:pPr>
-            <a:endParaRPr lang="en-US" altLang="ko-KR" sz="1600" dirty="0">
-              <a:latin typeface="D2Coding" panose="020B0609020101020101" pitchFamily="49" charset="-127"/>
-              <a:ea typeface="D2Coding" panose="020B0609020101020101" pitchFamily="49" charset="-127"/>
-            </a:endParaRPr>
-          </a:p>
-          <a:p>
-            <a:pPr marL="285750" indent="-285750">
-              <a:lnSpc>
-                <a:spcPct val="150000"/>
-              </a:lnSpc>
-              <a:buFont typeface="Wingdings" panose="05000000000000000000" pitchFamily="2" charset="2"/>
-              <a:buChar char="v"/>
-            </a:pPr>
             <a:r>
               <a:rPr lang="ko-KR" altLang="en-US" sz="1600" dirty="0">
                 <a:latin typeface="D2Coding" panose="020B0609020101020101" pitchFamily="49" charset="-127"/>
                 <a:ea typeface="D2Coding" panose="020B0609020101020101" pitchFamily="49" charset="-127"/>
               </a:rPr>
-              <a:t>멀티 에이전트 </a:t>
+              <a:t>여러 개의 </a:t>
             </a:r>
             <a:r>
               <a:rPr lang="en-US" altLang="ko-KR" sz="1600" dirty="0">
                 <a:latin typeface="D2Coding" panose="020B0609020101020101" pitchFamily="49" charset="-127"/>
                 <a:ea typeface="D2Coding" panose="020B0609020101020101" pitchFamily="49" charset="-127"/>
               </a:rPr>
-              <a:t>(Multi-agent)</a:t>
-            </a:r>
-          </a:p>
-          <a:p>
-            <a:pPr marL="742950" lvl="1" indent="-285750">
-              <a:lnSpc>
-                <a:spcPct val="150000"/>
-              </a:lnSpc>
-              <a:buFont typeface="Wingdings" panose="05000000000000000000" pitchFamily="2" charset="2"/>
-              <a:buChar char="v"/>
-            </a:pPr>
-            <a:r>
-              <a:rPr lang="ko-KR" altLang="en-US" sz="1400" dirty="0">
-                <a:latin typeface="D2Coding" panose="020B0609020101020101" pitchFamily="49" charset="-127"/>
-                <a:ea typeface="D2Coding" panose="020B0609020101020101" pitchFamily="49" charset="-127"/>
-              </a:rPr>
-              <a:t>여러 개의 </a:t>
-            </a:r>
-            <a:r>
-              <a:rPr lang="en-US" altLang="ko-KR" sz="1400" dirty="0">
-                <a:latin typeface="D2Coding" panose="020B0609020101020101" pitchFamily="49" charset="-127"/>
-                <a:ea typeface="D2Coding" panose="020B0609020101020101" pitchFamily="49" charset="-127"/>
-              </a:rPr>
               <a:t>LLM </a:t>
             </a:r>
             <a:r>
-              <a:rPr lang="ko-KR" altLang="en-US" sz="1400" dirty="0">
+              <a:rPr lang="ko-KR" altLang="en-US" sz="1600" dirty="0">
                 <a:latin typeface="D2Coding" panose="020B0609020101020101" pitchFamily="49" charset="-127"/>
                 <a:ea typeface="D2Coding" panose="020B0609020101020101" pitchFamily="49" charset="-127"/>
               </a:rPr>
               <a:t>에이전트로 구성</a:t>
             </a:r>
             <a:r>
-              <a:rPr lang="en-US" altLang="ko-KR" sz="1400" dirty="0">
+              <a:rPr lang="en-US" altLang="ko-KR" sz="1600" dirty="0">
                 <a:latin typeface="D2Coding" panose="020B0609020101020101" pitchFamily="49" charset="-127"/>
                 <a:ea typeface="D2Coding" panose="020B0609020101020101" pitchFamily="49" charset="-127"/>
               </a:rPr>
               <a:t>(</a:t>
             </a:r>
             <a:r>
-              <a:rPr lang="ko-KR" altLang="en-US" sz="1400" dirty="0">
+              <a:rPr lang="ko-KR" altLang="en-US" sz="1600" dirty="0">
                 <a:latin typeface="D2Coding" panose="020B0609020101020101" pitchFamily="49" charset="-127"/>
                 <a:ea typeface="D2Coding" panose="020B0609020101020101" pitchFamily="49" charset="-127"/>
               </a:rPr>
               <a:t>웹 검색 에이전트</a:t>
             </a:r>
             <a:r>
-              <a:rPr lang="en-US" altLang="ko-KR" sz="1400" dirty="0">
+              <a:rPr lang="en-US" altLang="ko-KR" sz="1600" dirty="0">
                 <a:latin typeface="D2Coding" panose="020B0609020101020101" pitchFamily="49" charset="-127"/>
                 <a:ea typeface="D2Coding" panose="020B0609020101020101" pitchFamily="49" charset="-127"/>
               </a:rPr>
               <a:t>, </a:t>
             </a:r>
             <a:r>
-              <a:rPr lang="ko-KR" altLang="en-US" sz="1400" dirty="0">
+              <a:rPr lang="ko-KR" altLang="en-US" sz="1600" dirty="0">
                 <a:latin typeface="D2Coding" panose="020B0609020101020101" pitchFamily="49" charset="-127"/>
                 <a:ea typeface="D2Coding" panose="020B0609020101020101" pitchFamily="49" charset="-127"/>
               </a:rPr>
               <a:t>코드 작성 에이전트</a:t>
             </a:r>
             <a:r>
-              <a:rPr lang="en-US" altLang="ko-KR" sz="1400" dirty="0">
+              <a:rPr lang="en-US" altLang="ko-KR" sz="1600" dirty="0">
                 <a:latin typeface="D2Coding" panose="020B0609020101020101" pitchFamily="49" charset="-127"/>
                 <a:ea typeface="D2Coding" panose="020B0609020101020101" pitchFamily="49" charset="-127"/>
               </a:rPr>
               <a:t>, </a:t>
             </a:r>
             <a:r>
-              <a:rPr lang="ko-KR" altLang="en-US" sz="1400" dirty="0">
+              <a:rPr lang="ko-KR" altLang="en-US" sz="1600" dirty="0">
                 <a:latin typeface="D2Coding" panose="020B0609020101020101" pitchFamily="49" charset="-127"/>
                 <a:ea typeface="D2Coding" panose="020B0609020101020101" pitchFamily="49" charset="-127"/>
               </a:rPr>
               <a:t>보안 검수 에이전트</a:t>
             </a:r>
             <a:r>
-              <a:rPr lang="en-US" altLang="ko-KR" sz="1400" dirty="0">
+              <a:rPr lang="en-US" altLang="ko-KR" sz="1600" dirty="0">
                 <a:latin typeface="D2Coding" panose="020B0609020101020101" pitchFamily="49" charset="-127"/>
                 <a:ea typeface="D2Coding" panose="020B0609020101020101" pitchFamily="49" charset="-127"/>
               </a:rPr>
               <a:t>)</a:t>
             </a:r>
-            <a:endParaRPr lang="ko-KR" altLang="en-US" sz="1400" dirty="0">
+            <a:endParaRPr lang="ko-KR" altLang="en-US" sz="1600" dirty="0">
               <a:latin typeface="D2Coding" panose="020B0609020101020101" pitchFamily="49" charset="-127"/>
               <a:ea typeface="D2Coding" panose="020B0609020101020101" pitchFamily="49" charset="-127"/>
             </a:endParaRPr>
@@ -3934,7 +3969,7 @@
         </p:nvSpPr>
         <p:spPr>
           <a:xfrm rot="5400000">
-            <a:off x="4767262" y="3116103"/>
+            <a:off x="5262562" y="2916078"/>
             <a:ext cx="723900" cy="1457324"/>
           </a:xfrm>
           <a:prstGeom prst="stripedRightArrow">
@@ -3983,7 +4018,7 @@
         </p:nvSpPr>
         <p:spPr>
           <a:xfrm>
-            <a:off x="4619624" y="3583155"/>
+            <a:off x="5114924" y="3383130"/>
             <a:ext cx="1019175" cy="523220"/>
           </a:xfrm>
           <a:prstGeom prst="rect">
@@ -4223,8 +4258,8 @@
         </p:nvSpPr>
         <p:spPr>
           <a:xfrm>
-            <a:off x="589022" y="1248422"/>
-            <a:ext cx="10964802" cy="793166"/>
+            <a:off x="589022" y="1210322"/>
+            <a:ext cx="10964802" cy="880819"/>
           </a:xfrm>
           <a:prstGeom prst="rect">
             <a:avLst/>
@@ -4245,90 +4280,90 @@
               <a:buChar char="v"/>
             </a:pPr>
             <a:r>
-              <a:rPr lang="ko-KR" altLang="en-US" sz="1600" dirty="0">
+              <a:rPr lang="ko-KR" altLang="en-US" dirty="0">
                 <a:latin typeface="D2Coding" panose="020B0609020101020101" pitchFamily="49" charset="-127"/>
                 <a:ea typeface="D2Coding" panose="020B0609020101020101" pitchFamily="49" charset="-127"/>
               </a:rPr>
               <a:t>생성자</a:t>
             </a:r>
             <a:r>
-              <a:rPr lang="en-US" altLang="ko-KR" sz="1600" dirty="0">
+              <a:rPr lang="en-US" altLang="ko-KR" dirty="0">
                 <a:latin typeface="D2Coding" panose="020B0609020101020101" pitchFamily="49" charset="-127"/>
                 <a:ea typeface="D2Coding" panose="020B0609020101020101" pitchFamily="49" charset="-127"/>
               </a:rPr>
               <a:t>(Creator) </a:t>
             </a:r>
             <a:r>
-              <a:rPr lang="ko-KR" altLang="en-US" sz="1600" dirty="0">
+              <a:rPr lang="ko-KR" altLang="en-US" dirty="0">
                 <a:latin typeface="D2Coding" panose="020B0609020101020101" pitchFamily="49" charset="-127"/>
                 <a:ea typeface="D2Coding" panose="020B0609020101020101" pitchFamily="49" charset="-127"/>
               </a:rPr>
               <a:t>프롬프트와 </a:t>
             </a:r>
             <a:r>
-              <a:rPr lang="ko-KR" altLang="en-US" sz="1600" dirty="0" err="1">
+              <a:rPr lang="ko-KR" altLang="en-US" dirty="0" err="1">
                 <a:latin typeface="D2Coding" panose="020B0609020101020101" pitchFamily="49" charset="-127"/>
                 <a:ea typeface="D2Coding" panose="020B0609020101020101" pitchFamily="49" charset="-127"/>
               </a:rPr>
               <a:t>수정자</a:t>
             </a:r>
             <a:r>
-              <a:rPr lang="en-US" altLang="ko-KR" sz="1600" dirty="0">
+              <a:rPr lang="en-US" altLang="ko-KR" dirty="0">
                 <a:latin typeface="D2Coding" panose="020B0609020101020101" pitchFamily="49" charset="-127"/>
                 <a:ea typeface="D2Coding" panose="020B0609020101020101" pitchFamily="49" charset="-127"/>
               </a:rPr>
               <a:t>(Reviser) </a:t>
             </a:r>
             <a:r>
-              <a:rPr lang="ko-KR" altLang="en-US" sz="1600" dirty="0">
+              <a:rPr lang="ko-KR" altLang="en-US" dirty="0">
                 <a:latin typeface="D2Coding" panose="020B0609020101020101" pitchFamily="49" charset="-127"/>
                 <a:ea typeface="D2Coding" panose="020B0609020101020101" pitchFamily="49" charset="-127"/>
               </a:rPr>
               <a:t>프롬프트 사이에 하나의 루프</a:t>
             </a:r>
             <a:r>
-              <a:rPr lang="en-US" altLang="ko-KR" sz="1600" dirty="0">
+              <a:rPr lang="en-US" altLang="ko-KR" dirty="0">
                 <a:latin typeface="D2Coding" panose="020B0609020101020101" pitchFamily="49" charset="-127"/>
                 <a:ea typeface="D2Coding" panose="020B0609020101020101" pitchFamily="49" charset="-127"/>
               </a:rPr>
               <a:t>(Loop)</a:t>
             </a:r>
             <a:r>
-              <a:rPr lang="ko-KR" altLang="en-US" sz="1600" dirty="0">
+              <a:rPr lang="ko-KR" altLang="en-US" dirty="0">
                 <a:latin typeface="D2Coding" panose="020B0609020101020101" pitchFamily="49" charset="-127"/>
                 <a:ea typeface="D2Coding" panose="020B0609020101020101" pitchFamily="49" charset="-127"/>
               </a:rPr>
               <a:t>를 형성</a:t>
             </a:r>
             <a:r>
-              <a:rPr lang="en-US" altLang="ko-KR" sz="1600" dirty="0">
+              <a:rPr lang="en-US" altLang="ko-KR" dirty="0">
                 <a:latin typeface="D2Coding" panose="020B0609020101020101" pitchFamily="49" charset="-127"/>
                 <a:ea typeface="D2Coding" panose="020B0609020101020101" pitchFamily="49" charset="-127"/>
               </a:rPr>
               <a:t>, </a:t>
             </a:r>
             <a:r>
-              <a:rPr lang="ko-KR" altLang="en-US" sz="1600" dirty="0">
+              <a:rPr lang="ko-KR" altLang="en-US" dirty="0">
                 <a:latin typeface="D2Coding" panose="020B0609020101020101" pitchFamily="49" charset="-127"/>
                 <a:ea typeface="D2Coding" panose="020B0609020101020101" pitchFamily="49" charset="-127"/>
               </a:rPr>
               <a:t>즉 곱씹어 보면</a:t>
             </a:r>
             <a:r>
-              <a:rPr lang="en-US" altLang="ko-KR" sz="1600" dirty="0">
+              <a:rPr lang="en-US" altLang="ko-KR" dirty="0">
                 <a:latin typeface="D2Coding" panose="020B0609020101020101" pitchFamily="49" charset="-127"/>
                 <a:ea typeface="D2Coding" panose="020B0609020101020101" pitchFamily="49" charset="-127"/>
               </a:rPr>
               <a:t>(Reflection) System 2</a:t>
             </a:r>
             <a:r>
-              <a:rPr lang="ko-KR" altLang="en-US" sz="1600" dirty="0">
+              <a:rPr lang="ko-KR" altLang="en-US" dirty="0">
                 <a:latin typeface="D2Coding" panose="020B0609020101020101" pitchFamily="49" charset="-127"/>
                 <a:ea typeface="D2Coding" panose="020B0609020101020101" pitchFamily="49" charset="-127"/>
               </a:rPr>
               <a:t>로 향상이 가능</a:t>
             </a:r>
-            <a:endParaRPr lang="en-US" altLang="ko-KR" sz="1600" dirty="0">
+            <a:endParaRPr lang="en-US" altLang="ko-KR" dirty="0">
               <a:latin typeface="D2Coding" panose="020B0609020101020101" pitchFamily="49" charset="-127"/>
               <a:ea typeface="D2Coding" panose="020B0609020101020101" pitchFamily="49" charset="-127"/>
             </a:endParaRPr>
@@ -4610,7 +4645,21 @@
                 <a:latin typeface="D2Coding" panose="020B0609020101020101" pitchFamily="49" charset="-127"/>
                 <a:ea typeface="D2Coding" panose="020B0609020101020101" pitchFamily="49" charset="-127"/>
               </a:rPr>
-              <a:t>(비판 및 개선안 작성      </a:t>
+              <a:t>(비판 및 개선안 작성</a:t>
+            </a:r>
+            <a:r>
+              <a:rPr lang="en-US" altLang="ko-KR" sz="1600" dirty="0">
+                <a:latin typeface="D2Coding" panose="020B0609020101020101" pitchFamily="49" charset="-127"/>
+                <a:ea typeface="D2Coding" panose="020B0609020101020101" pitchFamily="49" charset="-127"/>
+              </a:rPr>
+              <a:t>)</a:t>
+            </a:r>
+            <a:r>
+              <a:rPr lang="ko-KR" altLang="en-US" sz="1600" dirty="0">
+                <a:latin typeface="D2Coding" panose="020B0609020101020101" pitchFamily="49" charset="-127"/>
+                <a:ea typeface="D2Coding" panose="020B0609020101020101" pitchFamily="49" charset="-127"/>
+              </a:rPr>
+              <a:t>      </a:t>
             </a:r>
           </a:p>
         </p:txBody>
@@ -4918,7 +4967,7 @@
         </p:nvSpPr>
         <p:spPr>
           <a:xfrm>
-            <a:off x="580103" y="1279147"/>
+            <a:off x="580103" y="1231522"/>
             <a:ext cx="10964802" cy="1162498"/>
           </a:xfrm>
           <a:prstGeom prst="rect">
